--- a/classes/parte-1-redes-y-seguridad-de-redes/030-nmap-escaneo-de-puertos-y-tipos-de-escaneo/clase-030-presentacion.pptx
+++ b/classes/parte-1-redes-y-seguridad-de-redes/030-nmap-escaneo-de-puertos-y-tipos-de-escaneo/clase-030-presentacion.pptx
@@ -17,6 +17,9 @@
     <p:sldId id="265" r:id="rId16"/>
     <p:sldId id="266" r:id="rId17"/>
     <p:sldId id="267" r:id="rId18"/>
+    <p:sldId id="268" r:id="rId19"/>
+    <p:sldId id="269" r:id="rId20"/>
+    <p:sldId id="270" r:id="rId21"/>
   </p:sldIdLst>
   <p:sldSz cx="9144000" cy="6858000" type="screen4x3"/>
   <p:notesSz cx="6858000" cy="9144000"/>
@@ -3198,7 +3201,7 @@
                   <a:srgbClr val="0B3D2E"/>
                 </a:solidFill>
               </a:rPr>
-              <a:t>⚠️ Errores comunes</a:t>
+              <a:t>✍️ Ejercicios</a:t>
             </a:r>
           </a:p>
         </p:txBody>
@@ -3236,67 +3239,82 @@
                   <a:srgbClr val="22282E"/>
                 </a:solidFill>
               </a:rPr>
-              <a:t>•  -sS cae a connect scan — Sin privilegios; ejecuta con sudo</a:t>
-            </a:r>
-          </a:p>
-          <a:p>
-            <a:pPr>
-              <a:spcAft>
-                <a:spcPts val="600"/>
-              </a:spcAft>
-            </a:pPr>
-            <a:r>
-              <a:rPr sz="1500">
-                <a:solidFill>
-                  <a:srgbClr val="22282E"/>
-                </a:solidFill>
-              </a:rPr>
-              <a:t>•  UDP scan tardísimo — Es normal por rate-limiting ICMP; limita puertos con -p o usa --host-timeout</a:t>
-            </a:r>
-          </a:p>
-          <a:p>
-            <a:pPr>
-              <a:spcAft>
-                <a:spcPts val="600"/>
-              </a:spcAft>
-            </a:pPr>
-            <a:r>
-              <a:rPr sz="1500">
-                <a:solidFill>
-                  <a:srgbClr val="22282E"/>
-                </a:solidFill>
-              </a:rPr>
-              <a:t>•  Todos los puertos filtered — Firewall descarta sondas; combina con -Pn, prueba otros tipos, revisa alcance/ruta</a:t>
-            </a:r>
-          </a:p>
-          <a:p>
-            <a:pPr>
-              <a:spcAft>
-                <a:spcPts val="600"/>
-              </a:spcAft>
-            </a:pPr>
-            <a:r>
-              <a:rPr sz="1500">
-                <a:solidFill>
-                  <a:srgbClr val="22282E"/>
-                </a:solidFill>
-              </a:rPr>
-              <a:t>•  FIN/NULL/Xmas dan todo open\ — filtered</a:t>
-            </a:r>
-          </a:p>
-          <a:p>
-            <a:pPr>
-              <a:spcAft>
-                <a:spcPts val="600"/>
-              </a:spcAft>
-            </a:pPr>
-            <a:r>
-              <a:rPr sz="1500">
-                <a:solidFill>
-                  <a:srgbClr val="22282E"/>
-                </a:solidFill>
-              </a:rPr>
-              <a:t>•  Resultados inconsistentes entre corridas — Temporización agresiva provoca pérdidas; baja a -T3 o aumenta reintentos</a:t>
+              <a:t>•  Escanea el mismo host con -sS y -sT y compara tiempos y estados; explica por qué difieren.</a:t>
+            </a:r>
+          </a:p>
+          <a:p>
+            <a:pPr>
+              <a:spcAft>
+                <a:spcPts val="600"/>
+              </a:spcAft>
+            </a:pPr>
+            <a:r>
+              <a:rPr sz="1500">
+                <a:solidFill>
+                  <a:srgbClr val="22282E"/>
+                </a:solidFill>
+              </a:rPr>
+              <a:t>•  Usa --reason para averiguar por qué un puerto aparece como filtered.</a:t>
+            </a:r>
+          </a:p>
+          <a:p>
+            <a:pPr>
+              <a:spcAft>
+                <a:spcPts val="600"/>
+              </a:spcAft>
+            </a:pPr>
+            <a:r>
+              <a:rPr sz="1500">
+                <a:solidFill>
+                  <a:srgbClr val="22282E"/>
+                </a:solidFill>
+              </a:rPr>
+              <a:t>•  Haz un UDP scan de 53 y explica por qué puede salir open\|filtered.</a:t>
+            </a:r>
+          </a:p>
+          <a:p>
+            <a:pPr>
+              <a:spcAft>
+                <a:spcPts val="600"/>
+              </a:spcAft>
+            </a:pPr>
+            <a:r>
+              <a:rPr sz="1500">
+                <a:solidFill>
+                  <a:srgbClr val="22282E"/>
+                </a:solidFill>
+              </a:rPr>
+              <a:t>•  Con -sA, deduce si el firewall del objetivo es con estado o sin estado.</a:t>
+            </a:r>
+          </a:p>
+          <a:p>
+            <a:pPr>
+              <a:spcAft>
+                <a:spcPts val="600"/>
+              </a:spcAft>
+            </a:pPr>
+            <a:r>
+              <a:rPr sz="1500">
+                <a:solidFill>
+                  <a:srgbClr val="22282E"/>
+                </a:solidFill>
+              </a:rPr>
+              <a:t>•  Mide cuánto tarda -p- con -T3 vs. -T4 --min-rate 1000 y comenta el riesgo de perder puertos.</a:t>
+            </a:r>
+          </a:p>
+          <a:p>
+            <a:pPr>
+              <a:spcAft>
+                <a:spcPts val="600"/>
+              </a:spcAft>
+            </a:pPr>
+            <a:r>
+              <a:rPr sz="1500">
+                <a:solidFill>
+                  <a:srgbClr val="22282E"/>
+                </a:solidFill>
+              </a:rPr>
+              <a:t>•  Escanea un rango de puertos por nombre de servicio: -p http,https,domain.</a:t>
             </a:r>
           </a:p>
         </p:txBody>
@@ -3347,7 +3365,7 @@
                   <a:srgbClr val="0B3D2E"/>
                 </a:solidFill>
               </a:rPr>
-              <a:t>❓ Preguntas frecuentes</a:t>
+              <a:t>📝 Reto verificable</a:t>
             </a:r>
           </a:p>
         </p:txBody>
@@ -3385,97 +3403,22 @@
                   <a:srgbClr val="22282E"/>
                 </a:solidFill>
               </a:rPr>
-              <a:t>•  ❓ ¿Cuál es el escaneo por defecto?</a:t>
-            </a:r>
-          </a:p>
-          <a:p>
-            <a:pPr>
-              <a:spcAft>
-                <a:spcPts val="600"/>
-              </a:spcAft>
-            </a:pPr>
-            <a:r>
-              <a:rPr sz="1500">
-                <a:solidFill>
-                  <a:srgbClr val="22282E"/>
-                </a:solidFill>
-              </a:rPr>
-              <a:t>•  Con privilegios, -sS (SYN). Sin privilegios, -sT (connect). Puedes forzar cualquiera explícitamente.</a:t>
-            </a:r>
-          </a:p>
-          <a:p>
-            <a:pPr>
-              <a:spcAft>
-                <a:spcPts val="600"/>
-              </a:spcAft>
-            </a:pPr>
-            <a:r>
-              <a:rPr sz="1500">
-                <a:solidFill>
-                  <a:srgbClr val="22282E"/>
-                </a:solidFill>
-              </a:rPr>
-              <a:t>•  ❓ ¿Por qué el UDP scan es tan lento?</a:t>
-            </a:r>
-          </a:p>
-          <a:p>
-            <a:pPr>
-              <a:spcAft>
-                <a:spcPts val="600"/>
-              </a:spcAft>
-            </a:pPr>
-            <a:r>
-              <a:rPr sz="1500">
-                <a:solidFill>
-                  <a:srgbClr val="22282E"/>
-                </a:solidFill>
-              </a:rPr>
-              <a:t>•  Porque la ausencia de respuesta es ambigua y los hosts limitan la tasa de mensajes ICMP unreachable, obligando a Nmap a esperar y reintentar.</a:t>
-            </a:r>
-          </a:p>
-          <a:p>
-            <a:pPr>
-              <a:spcAft>
-                <a:spcPts val="600"/>
-              </a:spcAft>
-            </a:pPr>
-            <a:r>
-              <a:rPr sz="1500">
-                <a:solidFill>
-                  <a:srgbClr val="22282E"/>
-                </a:solidFill>
-              </a:rPr>
-              <a:t>•  ❓ ¿Los escaneos "stealth" son realmente invisibles?</a:t>
-            </a:r>
-          </a:p>
-          <a:p>
-            <a:pPr>
-              <a:spcAft>
-                <a:spcPts val="600"/>
-              </a:spcAft>
-            </a:pPr>
-            <a:r>
-              <a:rPr sz="1500">
-                <a:solidFill>
-                  <a:srgbClr val="22282E"/>
-                </a:solidFill>
-              </a:rPr>
-              <a:t>•  No. Un IDS moderno (Suricata/Snort) los detecta. "Stealth" se refiere a que evitan completar el handshake y ciertos logs de aplicación, no a ser indetectables.</a:t>
-            </a:r>
-          </a:p>
-          <a:p>
-            <a:pPr>
-              <a:spcAft>
-                <a:spcPts val="600"/>
-              </a:spcAft>
-            </a:pPr>
-            <a:r>
-              <a:rPr sz="1500">
-                <a:solidFill>
-                  <a:srgbClr val="22282E"/>
-                </a:solidFill>
-              </a:rPr>
-              <a:t>•  ❓ ¿Qué diferencia hay entre closed y filtered?</a:t>
+              <a:t>•  Elabora un inventario de puertos abiertos TCP y UDP de un host de laboratorio, indicando para cada puerto el estado y la razón (--reason). Entrega el comando usado, la salida -oN y una tabla con…</a:t>
+            </a:r>
+          </a:p>
+          <a:p>
+            <a:pPr>
+              <a:spcAft>
+                <a:spcPts val="600"/>
+              </a:spcAft>
+            </a:pPr>
+            <a:r>
+              <a:rPr sz="1500">
+                <a:solidFill>
+                  <a:srgbClr val="22282E"/>
+                </a:solidFill>
+              </a:rPr>
+              <a:t>•  Criterio de aceptación: la tabla coincide con un reescaneo del revisor y cada estado está respaldado por la razón correcta (p. ej. syn-ack para open, no-response/admin-prohibited para filtered).</a:t>
             </a:r>
           </a:p>
         </p:txBody>
@@ -3526,7 +3469,7 @@
                   <a:srgbClr val="0B3D2E"/>
                 </a:solidFill>
               </a:rPr>
-              <a:t>🔗 Referencias</a:t>
+              <a:t>⚠️ Errores comunes</a:t>
             </a:r>
           </a:p>
         </p:txBody>
@@ -3564,6 +3507,334 @@
                   <a:srgbClr val="22282E"/>
                 </a:solidFill>
               </a:rPr>
+              <a:t>•  -sS cae a connect scan — Sin privilegios; ejecuta con sudo</a:t>
+            </a:r>
+          </a:p>
+          <a:p>
+            <a:pPr>
+              <a:spcAft>
+                <a:spcPts val="600"/>
+              </a:spcAft>
+            </a:pPr>
+            <a:r>
+              <a:rPr sz="1500">
+                <a:solidFill>
+                  <a:srgbClr val="22282E"/>
+                </a:solidFill>
+              </a:rPr>
+              <a:t>•  UDP scan tardísimo — Es normal por rate-limiting ICMP; limita puertos con -p o usa --host-timeout</a:t>
+            </a:r>
+          </a:p>
+          <a:p>
+            <a:pPr>
+              <a:spcAft>
+                <a:spcPts val="600"/>
+              </a:spcAft>
+            </a:pPr>
+            <a:r>
+              <a:rPr sz="1500">
+                <a:solidFill>
+                  <a:srgbClr val="22282E"/>
+                </a:solidFill>
+              </a:rPr>
+              <a:t>•  Todos los puertos filtered — Firewall descarta sondas; combina con -Pn, prueba otros tipos, revisa alcance/ruta</a:t>
+            </a:r>
+          </a:p>
+          <a:p>
+            <a:pPr>
+              <a:spcAft>
+                <a:spcPts val="600"/>
+              </a:spcAft>
+            </a:pPr>
+            <a:r>
+              <a:rPr sz="1500">
+                <a:solidFill>
+                  <a:srgbClr val="22282E"/>
+                </a:solidFill>
+              </a:rPr>
+              <a:t>•  FIN/NULL/Xmas dan todo open\ — filtered</a:t>
+            </a:r>
+          </a:p>
+          <a:p>
+            <a:pPr>
+              <a:spcAft>
+                <a:spcPts val="600"/>
+              </a:spcAft>
+            </a:pPr>
+            <a:r>
+              <a:rPr sz="1500">
+                <a:solidFill>
+                  <a:srgbClr val="22282E"/>
+                </a:solidFill>
+              </a:rPr>
+              <a:t>•  Resultados inconsistentes entre corridas — Temporización agresiva provoca pérdidas; baja a -T3 o aumenta reintentos</a:t>
+            </a:r>
+          </a:p>
+        </p:txBody>
+      </p:sp>
+    </p:spTree>
+  </p:cSld>
+  <p:clrMapOvr>
+    <a:masterClrMapping/>
+  </p:clrMapOvr>
+</p:sld>
+</file>
+
+<file path=ppt/slides/slide13.xml><?xml version="1.0" encoding="utf-8"?>
+<p:sld xmlns:a="http://schemas.openxmlformats.org/drawingml/2006/main" xmlns:p="http://schemas.openxmlformats.org/presentationml/2006/main" xmlns:r="http://schemas.openxmlformats.org/officeDocument/2006/relationships">
+  <p:cSld>
+    <p:spTree>
+      <p:nvGrpSpPr>
+        <p:cNvPr id="1" name=""/>
+        <p:cNvGrpSpPr/>
+        <p:nvPr/>
+      </p:nvGrpSpPr>
+      <p:grpSpPr/>
+      <p:sp>
+        <p:nvSpPr>
+          <p:cNvPr id="2" name="TextBox 1"/>
+          <p:cNvSpPr txBox="1"/>
+          <p:nvPr/>
+        </p:nvSpPr>
+        <p:spPr>
+          <a:xfrm>
+            <a:off x="457200" y="320040"/>
+            <a:ext cx="8229600" cy="822960"/>
+          </a:xfrm>
+          <a:prstGeom prst="rect">
+            <a:avLst/>
+          </a:prstGeom>
+          <a:noFill/>
+        </p:spPr>
+        <p:txBody>
+          <a:bodyPr wrap="square">
+            <a:spAutoFit/>
+          </a:bodyPr>
+          <a:lstStyle/>
+          <a:p>
+            <a:r>
+              <a:rPr sz="2600" b="1">
+                <a:solidFill>
+                  <a:srgbClr val="0B3D2E"/>
+                </a:solidFill>
+              </a:rPr>
+              <a:t>❓ Preguntas frecuentes</a:t>
+            </a:r>
+          </a:p>
+        </p:txBody>
+      </p:sp>
+      <p:sp>
+        <p:nvSpPr>
+          <p:cNvPr id="3" name="TextBox 2"/>
+          <p:cNvSpPr txBox="1"/>
+          <p:nvPr/>
+        </p:nvSpPr>
+        <p:spPr>
+          <a:xfrm>
+            <a:off x="457200" y="1280160"/>
+            <a:ext cx="8229600" cy="4937760"/>
+          </a:xfrm>
+          <a:prstGeom prst="rect">
+            <a:avLst/>
+          </a:prstGeom>
+          <a:noFill/>
+        </p:spPr>
+        <p:txBody>
+          <a:bodyPr wrap="square">
+            <a:spAutoFit/>
+          </a:bodyPr>
+          <a:lstStyle/>
+          <a:p>
+            <a:pPr>
+              <a:spcAft>
+                <a:spcPts val="600"/>
+              </a:spcAft>
+            </a:pPr>
+            <a:r>
+              <a:rPr sz="1500">
+                <a:solidFill>
+                  <a:srgbClr val="22282E"/>
+                </a:solidFill>
+              </a:rPr>
+              <a:t>•  ❓ ¿Cuál es el escaneo por defecto?</a:t>
+            </a:r>
+          </a:p>
+          <a:p>
+            <a:pPr>
+              <a:spcAft>
+                <a:spcPts val="600"/>
+              </a:spcAft>
+            </a:pPr>
+            <a:r>
+              <a:rPr sz="1500">
+                <a:solidFill>
+                  <a:srgbClr val="22282E"/>
+                </a:solidFill>
+              </a:rPr>
+              <a:t>•  Con privilegios, -sS (SYN). Sin privilegios, -sT (connect). Puedes forzar cualquiera explícitamente.</a:t>
+            </a:r>
+          </a:p>
+          <a:p>
+            <a:pPr>
+              <a:spcAft>
+                <a:spcPts val="600"/>
+              </a:spcAft>
+            </a:pPr>
+            <a:r>
+              <a:rPr sz="1500">
+                <a:solidFill>
+                  <a:srgbClr val="22282E"/>
+                </a:solidFill>
+              </a:rPr>
+              <a:t>•  ❓ ¿Por qué el UDP scan es tan lento?</a:t>
+            </a:r>
+          </a:p>
+          <a:p>
+            <a:pPr>
+              <a:spcAft>
+                <a:spcPts val="600"/>
+              </a:spcAft>
+            </a:pPr>
+            <a:r>
+              <a:rPr sz="1500">
+                <a:solidFill>
+                  <a:srgbClr val="22282E"/>
+                </a:solidFill>
+              </a:rPr>
+              <a:t>•  Porque la ausencia de respuesta es ambigua y los hosts limitan la tasa de mensajes ICMP unreachable, obligando a Nmap a esperar y reintentar.</a:t>
+            </a:r>
+          </a:p>
+          <a:p>
+            <a:pPr>
+              <a:spcAft>
+                <a:spcPts val="600"/>
+              </a:spcAft>
+            </a:pPr>
+            <a:r>
+              <a:rPr sz="1500">
+                <a:solidFill>
+                  <a:srgbClr val="22282E"/>
+                </a:solidFill>
+              </a:rPr>
+              <a:t>•  ❓ ¿Los escaneos "stealth" son realmente invisibles?</a:t>
+            </a:r>
+          </a:p>
+          <a:p>
+            <a:pPr>
+              <a:spcAft>
+                <a:spcPts val="600"/>
+              </a:spcAft>
+            </a:pPr>
+            <a:r>
+              <a:rPr sz="1500">
+                <a:solidFill>
+                  <a:srgbClr val="22282E"/>
+                </a:solidFill>
+              </a:rPr>
+              <a:t>•  No. Un IDS moderno (Suricata/Snort) los detecta. "Stealth" se refiere a que evitan completar el handshake y ciertos logs de aplicación, no a ser indetectables.</a:t>
+            </a:r>
+          </a:p>
+          <a:p>
+            <a:pPr>
+              <a:spcAft>
+                <a:spcPts val="600"/>
+              </a:spcAft>
+            </a:pPr>
+            <a:r>
+              <a:rPr sz="1500">
+                <a:solidFill>
+                  <a:srgbClr val="22282E"/>
+                </a:solidFill>
+              </a:rPr>
+              <a:t>•  ❓ ¿Qué diferencia hay entre closed y filtered?</a:t>
+            </a:r>
+          </a:p>
+        </p:txBody>
+      </p:sp>
+    </p:spTree>
+  </p:cSld>
+  <p:clrMapOvr>
+    <a:masterClrMapping/>
+  </p:clrMapOvr>
+</p:sld>
+</file>
+
+<file path=ppt/slides/slide14.xml><?xml version="1.0" encoding="utf-8"?>
+<p:sld xmlns:a="http://schemas.openxmlformats.org/drawingml/2006/main" xmlns:p="http://schemas.openxmlformats.org/presentationml/2006/main" xmlns:r="http://schemas.openxmlformats.org/officeDocument/2006/relationships">
+  <p:cSld>
+    <p:spTree>
+      <p:nvGrpSpPr>
+        <p:cNvPr id="1" name=""/>
+        <p:cNvGrpSpPr/>
+        <p:nvPr/>
+      </p:nvGrpSpPr>
+      <p:grpSpPr/>
+      <p:sp>
+        <p:nvSpPr>
+          <p:cNvPr id="2" name="TextBox 1"/>
+          <p:cNvSpPr txBox="1"/>
+          <p:nvPr/>
+        </p:nvSpPr>
+        <p:spPr>
+          <a:xfrm>
+            <a:off x="457200" y="320040"/>
+            <a:ext cx="8229600" cy="822960"/>
+          </a:xfrm>
+          <a:prstGeom prst="rect">
+            <a:avLst/>
+          </a:prstGeom>
+          <a:noFill/>
+        </p:spPr>
+        <p:txBody>
+          <a:bodyPr wrap="square">
+            <a:spAutoFit/>
+          </a:bodyPr>
+          <a:lstStyle/>
+          <a:p>
+            <a:r>
+              <a:rPr sz="2600" b="1">
+                <a:solidFill>
+                  <a:srgbClr val="0B3D2E"/>
+                </a:solidFill>
+              </a:rPr>
+              <a:t>🔗 Referencias</a:t>
+            </a:r>
+          </a:p>
+        </p:txBody>
+      </p:sp>
+      <p:sp>
+        <p:nvSpPr>
+          <p:cNvPr id="3" name="TextBox 2"/>
+          <p:cNvSpPr txBox="1"/>
+          <p:nvPr/>
+        </p:nvSpPr>
+        <p:spPr>
+          <a:xfrm>
+            <a:off x="457200" y="1280160"/>
+            <a:ext cx="8229600" cy="4937760"/>
+          </a:xfrm>
+          <a:prstGeom prst="rect">
+            <a:avLst/>
+          </a:prstGeom>
+          <a:noFill/>
+        </p:spPr>
+        <p:txBody>
+          <a:bodyPr wrap="square">
+            <a:spAutoFit/>
+          </a:bodyPr>
+          <a:lstStyle/>
+          <a:p>
+            <a:pPr>
+              <a:spcAft>
+                <a:spcPts val="600"/>
+              </a:spcAft>
+            </a:pPr>
+            <a:r>
+              <a:rPr sz="1500">
+                <a:solidFill>
+                  <a:srgbClr val="22282E"/>
+                </a:solidFill>
+              </a:rPr>
               <a:t>•  Lyon, G. Nmap Network Scanning, cap. "Port Scanning Techniques". &lt;https://nmap.org/book/scan-methods.html&gt;</a:t>
             </a:r>
           </a:p>
@@ -3614,6 +3885,81 @@
           </a:p>
         </p:txBody>
       </p:sp>
+    </p:spTree>
+  </p:cSld>
+  <p:clrMapOvr>
+    <a:masterClrMapping/>
+  </p:clrMapOvr>
+</p:sld>
+</file>
+
+<file path=ppt/slides/slide15.xml><?xml version="1.0" encoding="utf-8"?>
+<p:sld xmlns:a="http://schemas.openxmlformats.org/drawingml/2006/main" xmlns:p="http://schemas.openxmlformats.org/presentationml/2006/main" xmlns:r="http://schemas.openxmlformats.org/officeDocument/2006/relationships">
+  <p:cSld>
+    <p:spTree>
+      <p:nvGrpSpPr>
+        <p:cNvPr id="1" name=""/>
+        <p:cNvGrpSpPr/>
+        <p:nvPr/>
+      </p:nvGrpSpPr>
+      <p:grpSpPr/>
+      <p:sp>
+        <p:nvSpPr>
+          <p:cNvPr id="2" name="TextBox 1"/>
+          <p:cNvSpPr txBox="1"/>
+          <p:nvPr/>
+        </p:nvSpPr>
+        <p:spPr>
+          <a:xfrm>
+            <a:off x="457200" y="274320"/>
+            <a:ext cx="8229600" cy="640080"/>
+          </a:xfrm>
+          <a:prstGeom prst="rect">
+            <a:avLst/>
+          </a:prstGeom>
+          <a:noFill/>
+        </p:spPr>
+        <p:txBody>
+          <a:bodyPr wrap="square">
+            <a:spAutoFit/>
+          </a:bodyPr>
+          <a:lstStyle/>
+          <a:p>
+            <a:r>
+              <a:rPr sz="2200" b="1">
+                <a:solidFill>
+                  <a:srgbClr val="0B3D2E"/>
+                </a:solidFill>
+              </a:rPr>
+              <a:t>Diagrama de la clase</a:t>
+            </a:r>
+          </a:p>
+        </p:txBody>
+      </p:sp>
+      <p:pic>
+        <p:nvPicPr>
+          <p:cNvPr id="3" name="Picture 2" descr="372183422f8534cc.png"/>
+          <p:cNvPicPr>
+            <a:picLocks noChangeAspect="1"/>
+          </p:cNvPicPr>
+          <p:nvPr/>
+        </p:nvPicPr>
+        <p:blipFill>
+          <a:blip r:embed="rId2"/>
+          <a:stretch>
+            <a:fillRect/>
+          </a:stretch>
+        </p:blipFill>
+        <p:spPr>
+          <a:xfrm>
+            <a:off x="664373" y="1097280"/>
+            <a:ext cx="7815253" cy="5303520"/>
+          </a:xfrm>
+          <a:prstGeom prst="rect">
+            <a:avLst/>
+          </a:prstGeom>
+        </p:spPr>
+      </p:pic>
     </p:spTree>
   </p:cSld>
   <p:clrMapOvr>
@@ -3698,7 +4044,7 @@
                   <a:srgbClr val="22282E"/>
                 </a:solidFill>
               </a:rPr>
-              <a:t>•  Dominar los tipos de escaneo de puertos de Nmap (SYN, connect, UDP, y los "stealth" FIN/NULL/Xmas/ACK), entender la máquina de estados TCP que hay detrás de cada uno y saber elegir el tipo, el rango de puertos y la temporización correctos según el objetivo y las defensas presentes.</a:t>
+              <a:t>•  Dominar los tipos de escaneo de puertos de Nmap (SYN, connect, UDP, y los "stealth" FIN/NULL/Xmas/ACK), entender la máquina de estados TCP que hay detrás de cada uno y saber elegir el tipo, el rango…</a:t>
             </a:r>
           </a:p>
         </p:txBody>
@@ -4107,7 +4453,7 @@
                   <a:srgbClr val="0B3D2E"/>
                 </a:solidFill>
               </a:rPr>
-              <a:t>📖 Definiciones y características</a:t>
+              <a:t>🧠 Explicación en profundidad</a:t>
             </a:r>
           </a:p>
         </p:txBody>
@@ -4145,67 +4491,97 @@
                   <a:srgbClr val="22282E"/>
                 </a:solidFill>
               </a:rPr>
-              <a:t>•  SYN scan (-sS): envía SYN y ante un SYN/ACK envía RST sin completar la conexión ("semiabierto"). Requiere privilegios; es el default de Nmap con root.</a:t>
-            </a:r>
-          </a:p>
-          <a:p>
-            <a:pPr>
-              <a:spcAft>
-                <a:spcPts val="600"/>
-              </a:spcAft>
-            </a:pPr>
-            <a:r>
-              <a:rPr sz="1500">
-                <a:solidFill>
-                  <a:srgbClr val="22282E"/>
-                </a:solidFill>
-              </a:rPr>
-              <a:t>•  Connect scan (-sT): completa el handshake con la syscall connect(). No necesita privilegios pero es más ruidoso y lento; queda en logs de aplicación.</a:t>
-            </a:r>
-          </a:p>
-          <a:p>
-            <a:pPr>
-              <a:spcAft>
-                <a:spcPts val="600"/>
-              </a:spcAft>
-            </a:pPr>
-            <a:r>
-              <a:rPr sz="1500">
-                <a:solidFill>
-                  <a:srgbClr val="22282E"/>
-                </a:solidFill>
-              </a:rPr>
-              <a:t>•  UDP scan (-sU): envía datagramas UDP; la ausencia de respuesta se interpreta como open\|filtered, y un ICMP port-unreachable como closed. Lento por diseño.</a:t>
-            </a:r>
-          </a:p>
-          <a:p>
-            <a:pPr>
-              <a:spcAft>
-                <a:spcPts val="600"/>
-              </a:spcAft>
-            </a:pPr>
-            <a:r>
-              <a:rPr sz="1500">
-                <a:solidFill>
-                  <a:srgbClr val="22282E"/>
-                </a:solidFill>
-              </a:rPr>
-              <a:t>•  Estado filtered: Nmap no puede determinar si el puerto está abierto porque un firewall descarta las sondas.</a:t>
-            </a:r>
-          </a:p>
-          <a:p>
-            <a:pPr>
-              <a:spcAft>
-                <a:spcPts val="600"/>
-              </a:spcAft>
-            </a:pPr>
-            <a:r>
-              <a:rPr sz="1500">
-                <a:solidFill>
-                  <a:srgbClr val="22282E"/>
-                </a:solidFill>
-              </a:rPr>
-              <a:t>•  ACK scan (-sA): no determina open/closed, sino si el puerto está filtered o unfiltered; sirve para mapear reglas de firewall con y sin estado.</a:t>
+              <a:t>•  Nmap no clasifica los puertos en abierto y cerrado, sino en seis estados, y la</a:t>
+            </a:r>
+          </a:p>
+          <a:p>
+            <a:pPr>
+              <a:spcAft>
+                <a:spcPts val="600"/>
+              </a:spcAft>
+            </a:pPr>
+            <a:r>
+              <a:rPr sz="1500">
+                <a:solidFill>
+                  <a:srgbClr val="22282E"/>
+                </a:solidFill>
+              </a:rPr>
+              <a:t>•  diferencia entre tres de ellos es la que convierte un escaneo en información útil sobre</a:t>
+            </a:r>
+          </a:p>
+          <a:p>
+            <a:pPr>
+              <a:spcAft>
+                <a:spcPts val="600"/>
+              </a:spcAft>
+            </a:pPr>
+            <a:r>
+              <a:rPr sz="1500">
+                <a:solidFill>
+                  <a:srgbClr val="22282E"/>
+                </a:solidFill>
+              </a:rPr>
+              <a:t>•  la arquitectura de la red. Abierto significa que hay una aplicación aceptando</a:t>
+            </a:r>
+          </a:p>
+          <a:p>
+            <a:pPr>
+              <a:spcAft>
+                <a:spcPts val="600"/>
+              </a:spcAft>
+            </a:pPr>
+            <a:r>
+              <a:rPr sz="1500">
+                <a:solidFill>
+                  <a:srgbClr val="22282E"/>
+                </a:solidFill>
+              </a:rPr>
+              <a:t>•  conexiones. Cerrado significa que el host respondió pero nadie escucha ahí: es una</a:t>
+            </a:r>
+          </a:p>
+          <a:p>
+            <a:pPr>
+              <a:spcAft>
+                <a:spcPts val="600"/>
+              </a:spcAft>
+            </a:pPr>
+            <a:r>
+              <a:rPr sz="1500">
+                <a:solidFill>
+                  <a:srgbClr val="22282E"/>
+                </a:solidFill>
+              </a:rPr>
+              <a:t>•  respuesta informativa, porque demuestra que el host existe y que el paquete llegó.</a:t>
+            </a:r>
+          </a:p>
+          <a:p>
+            <a:pPr>
+              <a:spcAft>
+                <a:spcPts val="600"/>
+              </a:spcAft>
+            </a:pPr>
+            <a:r>
+              <a:rPr sz="1500">
+                <a:solidFill>
+                  <a:srgbClr val="22282E"/>
+                </a:solidFill>
+              </a:rPr>
+              <a:t>•  Filtrado significa que Nmap no obtuvo respuesta o recibió un error ICMP: algo en el</a:t>
+            </a:r>
+          </a:p>
+          <a:p>
+            <a:pPr>
+              <a:spcAft>
+                <a:spcPts val="600"/>
+              </a:spcAft>
+            </a:pPr>
+            <a:r>
+              <a:rPr sz="1500">
+                <a:solidFill>
+                  <a:srgbClr val="22282E"/>
+                </a:solidFill>
+              </a:rPr>
+              <a:t>•  camino está descartando el paquete, y eso es un hallazgo sobre el firewall, no una</a:t>
             </a:r>
           </a:p>
         </p:txBody>
@@ -4256,7 +4632,7 @@
                   <a:srgbClr val="0B3D2E"/>
                 </a:solidFill>
               </a:rPr>
-              <a:t>🧰 Herramientas y preparación</a:t>
+              <a:t>📖 Definiciones y características</a:t>
             </a:r>
           </a:p>
         </p:txBody>
@@ -4294,37 +4670,67 @@
                   <a:srgbClr val="22282E"/>
                 </a:solidFill>
               </a:rPr>
-              <a:t>•  Nmap 7.x con privilegios (sudo) para los escaneos raw.</a:t>
-            </a:r>
-          </a:p>
-          <a:p>
-            <a:pPr>
-              <a:spcAft>
-                <a:spcPts val="600"/>
-              </a:spcAft>
-            </a:pPr>
-            <a:r>
-              <a:rPr sz="1500">
-                <a:solidFill>
-                  <a:srgbClr val="22282E"/>
-                </a:solidFill>
-              </a:rPr>
-              <a:t>•  Un objetivo de laboratorio con varios servicios (levanta contenedores: docker run -d -p 80:80 nginx, un DNS, etc.).</a:t>
-            </a:r>
-          </a:p>
-          <a:p>
-            <a:pPr>
-              <a:spcAft>
-                <a:spcPts val="600"/>
-              </a:spcAft>
-            </a:pPr>
-            <a:r>
-              <a:rPr sz="1500">
-                <a:solidFill>
-                  <a:srgbClr val="22282E"/>
-                </a:solidFill>
-              </a:rPr>
-              <a:t>•  tcpdump o Wireshark en paralelo para observar las sondas.</a:t>
+              <a:t>•  SYN scan (-sS): envía SYN y ante un SYN/ACK envía RST sin completar la conexión ("semiabierto"). Requiere privilegios; es el default de Nmap con root.</a:t>
+            </a:r>
+          </a:p>
+          <a:p>
+            <a:pPr>
+              <a:spcAft>
+                <a:spcPts val="600"/>
+              </a:spcAft>
+            </a:pPr>
+            <a:r>
+              <a:rPr sz="1500">
+                <a:solidFill>
+                  <a:srgbClr val="22282E"/>
+                </a:solidFill>
+              </a:rPr>
+              <a:t>•  Connect scan (-sT): completa el handshake con la syscall connect(). No necesita privilegios pero es más ruidoso y lento; queda en logs de aplicación.</a:t>
+            </a:r>
+          </a:p>
+          <a:p>
+            <a:pPr>
+              <a:spcAft>
+                <a:spcPts val="600"/>
+              </a:spcAft>
+            </a:pPr>
+            <a:r>
+              <a:rPr sz="1500">
+                <a:solidFill>
+                  <a:srgbClr val="22282E"/>
+                </a:solidFill>
+              </a:rPr>
+              <a:t>•  UDP scan (-sU): envía datagramas UDP; la ausencia de respuesta se interpreta como open\|filtered, y un ICMP port-unreachable como closed. Lento por diseño.</a:t>
+            </a:r>
+          </a:p>
+          <a:p>
+            <a:pPr>
+              <a:spcAft>
+                <a:spcPts val="600"/>
+              </a:spcAft>
+            </a:pPr>
+            <a:r>
+              <a:rPr sz="1500">
+                <a:solidFill>
+                  <a:srgbClr val="22282E"/>
+                </a:solidFill>
+              </a:rPr>
+              <a:t>•  Estado filtered: Nmap no puede determinar si el puerto está abierto porque un firewall descarta las sondas.</a:t>
+            </a:r>
+          </a:p>
+          <a:p>
+            <a:pPr>
+              <a:spcAft>
+                <a:spcPts val="600"/>
+              </a:spcAft>
+            </a:pPr>
+            <a:r>
+              <a:rPr sz="1500">
+                <a:solidFill>
+                  <a:srgbClr val="22282E"/>
+                </a:solidFill>
+              </a:rPr>
+              <a:t>•  ACK scan (-sA): no determina open/closed, sino si el puerto está filtered o unfiltered; sirve para mapear reglas de firewall con y sin estado.</a:t>
             </a:r>
           </a:p>
         </p:txBody>
@@ -4375,7 +4781,7 @@
                   <a:srgbClr val="0B3D2E"/>
                 </a:solidFill>
               </a:rPr>
-              <a:t>🧪 Laboratorio guiado</a:t>
+              <a:t>📔 Glosario</a:t>
             </a:r>
           </a:p>
         </p:txBody>
@@ -4413,97 +4819,97 @@
                   <a:srgbClr val="22282E"/>
                 </a:solidFill>
               </a:rPr>
-              <a:t>•  SYN scan de los 1000 puertos más comunes:</a:t>
-            </a:r>
-          </a:p>
-          <a:p>
-            <a:pPr>
-              <a:spcAft>
-                <a:spcPts val="600"/>
-              </a:spcAft>
-            </a:pPr>
-            <a:r>
-              <a:rPr sz="1500">
-                <a:solidFill>
-                  <a:srgbClr val="22282E"/>
-                </a:solidFill>
-              </a:rPr>
-              <a:t>•  sudo nmap -sS 192.168.56.101</a:t>
-            </a:r>
-          </a:p>
-          <a:p>
-            <a:pPr>
-              <a:spcAft>
-                <a:spcPts val="600"/>
-              </a:spcAft>
-            </a:pPr>
-            <a:r>
-              <a:rPr sz="1500">
-                <a:solidFill>
-                  <a:srgbClr val="22282E"/>
-                </a:solidFill>
-              </a:rPr>
-              <a:t>•  Observa en Wireshark que Nmap responde con RST a cada SYN/ACK.</a:t>
-            </a:r>
-          </a:p>
-          <a:p>
-            <a:pPr>
-              <a:spcAft>
-                <a:spcPts val="600"/>
-              </a:spcAft>
-            </a:pPr>
-            <a:r>
-              <a:rPr sz="1500">
-                <a:solidFill>
-                  <a:srgbClr val="22282E"/>
-                </a:solidFill>
-              </a:rPr>
-              <a:t>•  Connect scan sin privilegios y compara la salida:</a:t>
-            </a:r>
-          </a:p>
-          <a:p>
-            <a:pPr>
-              <a:spcAft>
-                <a:spcPts val="600"/>
-              </a:spcAft>
-            </a:pPr>
-            <a:r>
-              <a:rPr sz="1500">
-                <a:solidFill>
-                  <a:srgbClr val="22282E"/>
-                </a:solidFill>
-              </a:rPr>
-              <a:t>•  nmap -sT 192.168.56.101</a:t>
-            </a:r>
-          </a:p>
-          <a:p>
-            <a:pPr>
-              <a:spcAft>
-                <a:spcPts val="600"/>
-              </a:spcAft>
-            </a:pPr>
-            <a:r>
-              <a:rPr sz="1500">
-                <a:solidFill>
-                  <a:srgbClr val="22282E"/>
-                </a:solidFill>
-              </a:rPr>
-              <a:t>•  Escaneo completo de los 65535 puertos TCP:</a:t>
-            </a:r>
-          </a:p>
-          <a:p>
-            <a:pPr>
-              <a:spcAft>
-                <a:spcPts val="600"/>
-              </a:spcAft>
-            </a:pPr>
-            <a:r>
-              <a:rPr sz="1500">
-                <a:solidFill>
-                  <a:srgbClr val="22282E"/>
-                </a:solidFill>
-              </a:rPr>
-              <a:t>•  sudo nmap -sS -p- 192.168.56.101</a:t>
+              <a:t>•  Término — Definición concisa</a:t>
+            </a:r>
+          </a:p>
+          <a:p>
+            <a:pPr>
+              <a:spcAft>
+                <a:spcPts val="600"/>
+              </a:spcAft>
+            </a:pPr>
+            <a:r>
+              <a:rPr sz="1500">
+                <a:solidFill>
+                  <a:srgbClr val="22282E"/>
+                </a:solidFill>
+              </a:rPr>
+              <a:t>•  Abierto — Una aplicación acepta conexiones en ese puerto</a:t>
+            </a:r>
+          </a:p>
+          <a:p>
+            <a:pPr>
+              <a:spcAft>
+                <a:spcPts val="600"/>
+              </a:spcAft>
+            </a:pPr>
+            <a:r>
+              <a:rPr sz="1500">
+                <a:solidFill>
+                  <a:srgbClr val="22282E"/>
+                </a:solidFill>
+              </a:rPr>
+              <a:t>•  Cerrado — El host responde pero nadie escucha; prueba que el host existe</a:t>
+            </a:r>
+          </a:p>
+          <a:p>
+            <a:pPr>
+              <a:spcAft>
+                <a:spcPts val="600"/>
+              </a:spcAft>
+            </a:pPr>
+            <a:r>
+              <a:rPr sz="1500">
+                <a:solidFill>
+                  <a:srgbClr val="22282E"/>
+                </a:solidFill>
+              </a:rPr>
+              <a:t>•  Filtrado — Sin respuesta o error ICMP: un filtro descarta el tráfico</a:t>
+            </a:r>
+          </a:p>
+          <a:p>
+            <a:pPr>
+              <a:spcAft>
+                <a:spcPts val="600"/>
+              </a:spcAft>
+            </a:pPr>
+            <a:r>
+              <a:rPr sz="1500">
+                <a:solidFill>
+                  <a:srgbClr val="22282E"/>
+                </a:solidFill>
+              </a:rPr>
+              <a:t>•  open / filtered (ambiguo) — Estado indeterminado típico de UDP y de FIN/NULL/Xmas</a:t>
+            </a:r>
+          </a:p>
+          <a:p>
+            <a:pPr>
+              <a:spcAft>
+                <a:spcPts val="600"/>
+              </a:spcAft>
+            </a:pPr>
+            <a:r>
+              <a:rPr sz="1500">
+                <a:solidFill>
+                  <a:srgbClr val="22282E"/>
+                </a:solidFill>
+              </a:rPr>
+              <a:t>•  SYN scan (-sS) — Escaneo semiabierto; requiere raw sockets y privilegios</a:t>
+            </a:r>
+          </a:p>
+          <a:p>
+            <a:pPr>
+              <a:spcAft>
+                <a:spcPts val="600"/>
+              </a:spcAft>
+            </a:pPr>
+            <a:r>
+              <a:rPr sz="1500">
+                <a:solidFill>
+                  <a:srgbClr val="22282E"/>
+                </a:solidFill>
+              </a:rPr>
+              <a:t>•  Connect scan (-sT) — Usa connect(); sin privilegios, pero visible en los logs</a:t>
             </a:r>
           </a:p>
         </p:txBody>
@@ -4554,7 +4960,7 @@
                   <a:srgbClr val="0B3D2E"/>
                 </a:solidFill>
               </a:rPr>
-              <a:t>✍️ Ejercicios</a:t>
+              <a:t>🧰 Herramientas y preparación</a:t>
             </a:r>
           </a:p>
         </p:txBody>
@@ -4592,82 +4998,37 @@
                   <a:srgbClr val="22282E"/>
                 </a:solidFill>
               </a:rPr>
-              <a:t>•  Escanea el mismo host con -sS y -sT y compara tiempos y estados; explica por qué difieren.</a:t>
-            </a:r>
-          </a:p>
-          <a:p>
-            <a:pPr>
-              <a:spcAft>
-                <a:spcPts val="600"/>
-              </a:spcAft>
-            </a:pPr>
-            <a:r>
-              <a:rPr sz="1500">
-                <a:solidFill>
-                  <a:srgbClr val="22282E"/>
-                </a:solidFill>
-              </a:rPr>
-              <a:t>•  Usa --reason para averiguar por qué un puerto aparece como filtered.</a:t>
-            </a:r>
-          </a:p>
-          <a:p>
-            <a:pPr>
-              <a:spcAft>
-                <a:spcPts val="600"/>
-              </a:spcAft>
-            </a:pPr>
-            <a:r>
-              <a:rPr sz="1500">
-                <a:solidFill>
-                  <a:srgbClr val="22282E"/>
-                </a:solidFill>
-              </a:rPr>
-              <a:t>•  Haz un UDP scan de 53 y explica por qué puede salir open\|filtered.</a:t>
-            </a:r>
-          </a:p>
-          <a:p>
-            <a:pPr>
-              <a:spcAft>
-                <a:spcPts val="600"/>
-              </a:spcAft>
-            </a:pPr>
-            <a:r>
-              <a:rPr sz="1500">
-                <a:solidFill>
-                  <a:srgbClr val="22282E"/>
-                </a:solidFill>
-              </a:rPr>
-              <a:t>•  Con -sA, deduce si el firewall del objetivo es con estado o sin estado.</a:t>
-            </a:r>
-          </a:p>
-          <a:p>
-            <a:pPr>
-              <a:spcAft>
-                <a:spcPts val="600"/>
-              </a:spcAft>
-            </a:pPr>
-            <a:r>
-              <a:rPr sz="1500">
-                <a:solidFill>
-                  <a:srgbClr val="22282E"/>
-                </a:solidFill>
-              </a:rPr>
-              <a:t>•  Mide cuánto tarda -p- con -T3 vs. -T4 --min-rate 1000 y comenta el riesgo de perder puertos.</a:t>
-            </a:r>
-          </a:p>
-          <a:p>
-            <a:pPr>
-              <a:spcAft>
-                <a:spcPts val="600"/>
-              </a:spcAft>
-            </a:pPr>
-            <a:r>
-              <a:rPr sz="1500">
-                <a:solidFill>
-                  <a:srgbClr val="22282E"/>
-                </a:solidFill>
-              </a:rPr>
-              <a:t>•  Escanea un rango de puertos por nombre de servicio: -p http,https,domain.</a:t>
+              <a:t>•  Nmap 7.x con privilegios (sudo) para los escaneos raw.</a:t>
+            </a:r>
+          </a:p>
+          <a:p>
+            <a:pPr>
+              <a:spcAft>
+                <a:spcPts val="600"/>
+              </a:spcAft>
+            </a:pPr>
+            <a:r>
+              <a:rPr sz="1500">
+                <a:solidFill>
+                  <a:srgbClr val="22282E"/>
+                </a:solidFill>
+              </a:rPr>
+              <a:t>•  Un objetivo de laboratorio con varios servicios (levanta contenedores: docker run -d -p 80:80 nginx, un DNS, etc.).</a:t>
+            </a:r>
+          </a:p>
+          <a:p>
+            <a:pPr>
+              <a:spcAft>
+                <a:spcPts val="600"/>
+              </a:spcAft>
+            </a:pPr>
+            <a:r>
+              <a:rPr sz="1500">
+                <a:solidFill>
+                  <a:srgbClr val="22282E"/>
+                </a:solidFill>
+              </a:rPr>
+              <a:t>•  tcpdump o Wireshark en paralelo para observar las sondas.</a:t>
             </a:r>
           </a:p>
         </p:txBody>
@@ -4718,7 +5079,7 @@
                   <a:srgbClr val="0B3D2E"/>
                 </a:solidFill>
               </a:rPr>
-              <a:t>📝 Reto verificable</a:t>
+              <a:t>🧪 Laboratorio guiado</a:t>
             </a:r>
           </a:p>
         </p:txBody>
@@ -4756,22 +5117,97 @@
                   <a:srgbClr val="22282E"/>
                 </a:solidFill>
               </a:rPr>
-              <a:t>•  Elabora un inventario de puertos abiertos TCP y UDP de un host de laboratorio, indicando para cada puerto el estado y la razón (--reason). Entrega el comando usado, la salida -oN y una tabla con: puerto, protocolo, estado y razón. Incluye al menos un puerto filtered correctamente justificado.</a:t>
-            </a:r>
-          </a:p>
-          <a:p>
-            <a:pPr>
-              <a:spcAft>
-                <a:spcPts val="600"/>
-              </a:spcAft>
-            </a:pPr>
-            <a:r>
-              <a:rPr sz="1500">
-                <a:solidFill>
-                  <a:srgbClr val="22282E"/>
-                </a:solidFill>
-              </a:rPr>
-              <a:t>•  Criterio de aceptación: la tabla coincide con un reescaneo del revisor y cada estado está respaldado por la razón correcta (p. ej. syn-ack para open, no-response/admin-prohibited para filtered).</a:t>
+              <a:t>•  SYN scan de los 1000 puertos más comunes:</a:t>
+            </a:r>
+          </a:p>
+          <a:p>
+            <a:pPr>
+              <a:spcAft>
+                <a:spcPts val="600"/>
+              </a:spcAft>
+            </a:pPr>
+            <a:r>
+              <a:rPr sz="1500">
+                <a:solidFill>
+                  <a:srgbClr val="22282E"/>
+                </a:solidFill>
+              </a:rPr>
+              <a:t>•  Observa en Wireshark que Nmap responde con RST a cada SYN/ACK.</a:t>
+            </a:r>
+          </a:p>
+          <a:p>
+            <a:pPr>
+              <a:spcAft>
+                <a:spcPts val="600"/>
+              </a:spcAft>
+            </a:pPr>
+            <a:r>
+              <a:rPr sz="1500">
+                <a:solidFill>
+                  <a:srgbClr val="22282E"/>
+                </a:solidFill>
+              </a:rPr>
+              <a:t>•  Connect scan sin privilegios y compara la salida:</a:t>
+            </a:r>
+          </a:p>
+          <a:p>
+            <a:pPr>
+              <a:spcAft>
+                <a:spcPts val="600"/>
+              </a:spcAft>
+            </a:pPr>
+            <a:r>
+              <a:rPr sz="1500">
+                <a:solidFill>
+                  <a:srgbClr val="22282E"/>
+                </a:solidFill>
+              </a:rPr>
+              <a:t>•  Escaneo completo de los 65535 puertos TCP:</a:t>
+            </a:r>
+          </a:p>
+          <a:p>
+            <a:pPr>
+              <a:spcAft>
+                <a:spcPts val="600"/>
+              </a:spcAft>
+            </a:pPr>
+            <a:r>
+              <a:rPr sz="1500">
+                <a:solidFill>
+                  <a:srgbClr val="22282E"/>
+                </a:solidFill>
+              </a:rPr>
+              <a:t>•  UDP scan de puertos clave:</a:t>
+            </a:r>
+          </a:p>
+          <a:p>
+            <a:pPr>
+              <a:spcAft>
+                <a:spcPts val="600"/>
+              </a:spcAft>
+            </a:pPr>
+            <a:r>
+              <a:rPr sz="1500">
+                <a:solidFill>
+                  <a:srgbClr val="22282E"/>
+                </a:solidFill>
+              </a:rPr>
+              <a:t>•  Top-ports y escaneo rápido:</a:t>
+            </a:r>
+          </a:p>
+          <a:p>
+            <a:pPr>
+              <a:spcAft>
+                <a:spcPts val="600"/>
+              </a:spcAft>
+            </a:pPr>
+            <a:r>
+              <a:rPr sz="1500">
+                <a:solidFill>
+                  <a:srgbClr val="22282E"/>
+                </a:solidFill>
+              </a:rPr>
+              <a:t>•  ACK scan para mapear el firewall:</a:t>
             </a:r>
           </a:p>
         </p:txBody>
